--- a/네트워크 프로그래밍_프로젝트.pptx
+++ b/네트워크 프로그래밍_프로젝트.pptx
@@ -15576,6 +15576,7 @@
         <a:graphic>
           <a:graphicData uri="http://schemas.openxmlformats.org/drawingml/2006/table">
             <a:tbl>
+              <a:tblPr firstRow="1" bandRow="1"/>
               <a:tblGrid>
                 <a:gridCol w="5257800"/>
                 <a:gridCol w="5257800"/>
@@ -15852,7 +15853,7 @@
                       </a:r>
                       <a:r>
                         <a:rPr lang="ko-KR" altLang="en-US"/>
-                        <a:t>코인 토스</a:t>
+                        <a:t>턴 </a:t>
                       </a:r>
                       <a:endParaRPr lang="ko-KR" altLang="en-US"/>
                     </a:p>
@@ -15908,15 +15909,7 @@
                       </a:pPr>
                       <a:r>
                         <a:rPr lang="ko-KR" altLang="en-US"/>
-                        <a:t>선공</a:t>
-                      </a:r>
-                      <a:r>
-                        <a:rPr lang="en-US" altLang="ko-KR"/>
-                        <a:t>/</a:t>
-                      </a:r>
-                      <a:r>
-                        <a:rPr lang="ko-KR" altLang="en-US"/>
-                        <a:t>후공 기능 추가</a:t>
+                        <a:t>공탄을 자신에게 발사했을 경우 추가 턴</a:t>
                       </a:r>
                       <a:endParaRPr lang="ko-KR" altLang="en-US"/>
                     </a:p>
